--- a/AgenticAI/4-Agent-Architecture/Multi_Agent_System-pt1.pptx
+++ b/AgenticAI/4-Agent-Architecture/Multi_Agent_System-pt1.pptx
@@ -230,7 +230,7 @@
           <a:p>
             <a:fld id="{7BAEECA8-D063-486F-AE31-5020270C1449}" type="datetimeFigureOut">
               <a:rPr lang="en-US" smtClean="0"/>
-              <a:t>6/11/2026</a:t>
+              <a:t>6/22/2026</a:t>
             </a:fld>
             <a:endParaRPr lang="en-US"/>
           </a:p>
@@ -407,7 +407,7 @@
           <a:p>
             <a:fld id="{CB233BD1-3BA8-448D-9D08-7846095EA517}" type="datetimeFigureOut">
               <a:rPr lang="en-US" smtClean="0"/>
-              <a:t>6/11/2026</a:t>
+              <a:t>6/22/2026</a:t>
             </a:fld>
             <a:endParaRPr lang="en-US"/>
           </a:p>
@@ -821,7 +821,7 @@
           <a:p>
             <a:fld id="{6383FAE1-13DE-4511-8C1B-C8AFB720664C}" type="datetimeFigureOut">
               <a:rPr lang="en-US" smtClean="0"/>
-              <a:t>6/11/2026</a:t>
+              <a:t>6/22/2026</a:t>
             </a:fld>
             <a:endParaRPr lang="en-US"/>
           </a:p>
@@ -1019,7 +1019,7 @@
           <a:p>
             <a:fld id="{6383FAE1-13DE-4511-8C1B-C8AFB720664C}" type="datetimeFigureOut">
               <a:rPr lang="en-US" smtClean="0"/>
-              <a:t>6/11/2026</a:t>
+              <a:t>6/22/2026</a:t>
             </a:fld>
             <a:endParaRPr lang="en-US"/>
           </a:p>
@@ -1227,7 +1227,7 @@
           <a:p>
             <a:fld id="{6383FAE1-13DE-4511-8C1B-C8AFB720664C}" type="datetimeFigureOut">
               <a:rPr lang="en-US" smtClean="0"/>
-              <a:t>6/11/2026</a:t>
+              <a:t>6/22/2026</a:t>
             </a:fld>
             <a:endParaRPr lang="en-US"/>
           </a:p>
@@ -1425,7 +1425,7 @@
           <a:p>
             <a:fld id="{6383FAE1-13DE-4511-8C1B-C8AFB720664C}" type="datetimeFigureOut">
               <a:rPr lang="en-US" smtClean="0"/>
-              <a:t>6/11/2026</a:t>
+              <a:t>6/22/2026</a:t>
             </a:fld>
             <a:endParaRPr lang="en-US"/>
           </a:p>
@@ -1700,7 +1700,7 @@
           <a:p>
             <a:fld id="{6383FAE1-13DE-4511-8C1B-C8AFB720664C}" type="datetimeFigureOut">
               <a:rPr lang="en-US" smtClean="0"/>
-              <a:t>6/11/2026</a:t>
+              <a:t>6/22/2026</a:t>
             </a:fld>
             <a:endParaRPr lang="en-US"/>
           </a:p>
@@ -1965,7 +1965,7 @@
           <a:p>
             <a:fld id="{6383FAE1-13DE-4511-8C1B-C8AFB720664C}" type="datetimeFigureOut">
               <a:rPr lang="en-US" smtClean="0"/>
-              <a:t>6/11/2026</a:t>
+              <a:t>6/22/2026</a:t>
             </a:fld>
             <a:endParaRPr lang="en-US"/>
           </a:p>
@@ -2377,7 +2377,7 @@
           <a:p>
             <a:fld id="{6383FAE1-13DE-4511-8C1B-C8AFB720664C}" type="datetimeFigureOut">
               <a:rPr lang="en-US" smtClean="0"/>
-              <a:t>6/11/2026</a:t>
+              <a:t>6/22/2026</a:t>
             </a:fld>
             <a:endParaRPr lang="en-US"/>
           </a:p>
@@ -2518,7 +2518,7 @@
           <a:p>
             <a:fld id="{6383FAE1-13DE-4511-8C1B-C8AFB720664C}" type="datetimeFigureOut">
               <a:rPr lang="en-US" smtClean="0"/>
-              <a:t>6/11/2026</a:t>
+              <a:t>6/22/2026</a:t>
             </a:fld>
             <a:endParaRPr lang="en-US"/>
           </a:p>
@@ -2631,7 +2631,7 @@
           <a:p>
             <a:fld id="{6383FAE1-13DE-4511-8C1B-C8AFB720664C}" type="datetimeFigureOut">
               <a:rPr lang="en-US" smtClean="0"/>
-              <a:t>6/11/2026</a:t>
+              <a:t>6/22/2026</a:t>
             </a:fld>
             <a:endParaRPr lang="en-US"/>
           </a:p>
@@ -2942,7 +2942,7 @@
           <a:p>
             <a:fld id="{6383FAE1-13DE-4511-8C1B-C8AFB720664C}" type="datetimeFigureOut">
               <a:rPr lang="en-US" smtClean="0"/>
-              <a:t>6/11/2026</a:t>
+              <a:t>6/22/2026</a:t>
             </a:fld>
             <a:endParaRPr lang="en-US"/>
           </a:p>
@@ -3233,7 +3233,7 @@
           <a:p>
             <a:fld id="{6383FAE1-13DE-4511-8C1B-C8AFB720664C}" type="datetimeFigureOut">
               <a:rPr lang="en-US" smtClean="0"/>
-              <a:t>6/11/2026</a:t>
+              <a:t>6/22/2026</a:t>
             </a:fld>
             <a:endParaRPr lang="en-US"/>
           </a:p>
@@ -3477,7 +3477,7 @@
           <a:p>
             <a:fld id="{6383FAE1-13DE-4511-8C1B-C8AFB720664C}" type="datetimeFigureOut">
               <a:rPr lang="en-US" smtClean="0"/>
-              <a:t>6/11/2026</a:t>
+              <a:t>6/22/2026</a:t>
             </a:fld>
             <a:endParaRPr lang="en-US"/>
           </a:p>
@@ -8791,7 +8791,29 @@
                   </a:schemeClr>
                 </a:solidFill>
               </a:rPr>
-              <a:t>Problem (Latency) -&gt; Single Agent is taking too much time. The task can be parallelized.</a:t>
+              <a:t>Problem (</a:t>
+            </a:r>
+            <a:r>
+              <a:rPr lang="en-US" sz="2400" b="1" dirty="0">
+                <a:solidFill>
+                  <a:schemeClr val="accent6">
+                    <a:lumMod val="60000"/>
+                    <a:lumOff val="40000"/>
+                  </a:schemeClr>
+                </a:solidFill>
+              </a:rPr>
+              <a:t>Latency</a:t>
+            </a:r>
+            <a:r>
+              <a:rPr lang="en-US" sz="2400" dirty="0">
+                <a:solidFill>
+                  <a:schemeClr val="accent6">
+                    <a:lumMod val="60000"/>
+                    <a:lumOff val="40000"/>
+                  </a:schemeClr>
+                </a:solidFill>
+              </a:rPr>
+              <a:t>) -&gt; Single Agent is taking too much time. The task can be parallelized.</a:t>
             </a:r>
           </a:p>
           <a:p>
@@ -9450,7 +9472,7 @@
                   </a:schemeClr>
                 </a:solidFill>
               </a:rPr>
-              <a:t>verify against a blacklist. ~20ms</a:t>
+              <a:t>verify telephone against a blacklist. ~20ms</a:t>
             </a:r>
           </a:p>
           <a:p>
